--- a/outputs/freedom250_public_benefits.pptx
+++ b/outputs/freedom250_public_benefits.pptx
@@ -5,14 +5,16 @@
     <p:sldMasterId id="2147483648" r:id="rId1"/>
   </p:sldMasterIdLst>
   <p:notesMasterIdLst>
-    <p:notesMasterId r:id="rId7"/>
+    <p:notesMasterId r:id="rId9"/>
   </p:notesMasterIdLst>
   <p:sldIdLst>
     <p:sldId id="256" r:id="rId2"/>
-    <p:sldId id="257" r:id="rId3"/>
+    <p:sldId id="263" r:id="rId3"/>
     <p:sldId id="259" r:id="rId4"/>
-    <p:sldId id="258" r:id="rId5"/>
-    <p:sldId id="260" r:id="rId6"/>
+    <p:sldId id="261" r:id="rId5"/>
+    <p:sldId id="262" r:id="rId6"/>
+    <p:sldId id="258" r:id="rId7"/>
+    <p:sldId id="260" r:id="rId8"/>
   </p:sldIdLst>
   <p:sldSz cx="12192000" cy="6858000"/>
   <p:notesSz cx="6858000" cy="9144000"/>
@@ -114,6 +116,14 @@
 </p:presentation>
 </file>
 
+<file path=ppt/revisionInfo.xml><?xml version="1.0" encoding="utf-8"?>
+<p1510:revInfo xmlns:a="http://schemas.openxmlformats.org/drawingml/2006/main" xmlns:r="http://schemas.openxmlformats.org/officeDocument/2006/relationships" xmlns:p1510="http://schemas.microsoft.com/office/powerpoint/2015/10/main">
+  <p1510:revLst>
+    <p1510:client id="{967B9FC1-95CF-2E05-FE65-700CDA4B66DC}" v="172" dt="2026-07-04T03:55:56.100"/>
+  </p1510:revLst>
+</p1510:revInfo>
+</file>
+
 <file path=ppt/notesMasters/notesMaster1.xml><?xml version="1.0" encoding="utf-8"?>
 <p:notesMaster xmlns:a="http://schemas.openxmlformats.org/drawingml/2006/main" xmlns:r="http://schemas.openxmlformats.org/officeDocument/2006/relationships" xmlns:p="http://schemas.openxmlformats.org/presentationml/2006/main">
   <p:cSld>
@@ -329,7 +339,21 @@
           <a:bodyPr/>
           <a:lstStyle/>
           <a:p>
-            <a:endParaRPr/>
+            <a:r>
+              <a:rPr lang="en-US" dirty="0"/>
+              <a:t>We retrieve specific statutes of SBA regulations using key-word-search, and audit a small business's loan application and financial records to flag for </a:t>
+            </a:r>
+            <a:r>
+              <a:rPr lang="en-US" dirty="0" err="1"/>
+              <a:t>portential</a:t>
+            </a:r>
+            <a:r>
+              <a:rPr lang="en-US" dirty="0"/>
+              <a:t> fraud</a:t>
+            </a:r>
+          </a:p>
+          <a:p>
+            <a:endParaRPr dirty="0"/>
           </a:p>
         </p:txBody>
       </p:sp>
@@ -1034,7 +1058,7 @@
         </p:nvSpPr>
         <p:spPr>
           <a:xfrm>
-            <a:off x="8210550" y="0"/>
+            <a:off x="8220075" y="-80962"/>
             <a:ext cx="3981450" cy="6858000"/>
           </a:xfrm>
           <a:prstGeom prst="rect">
@@ -1048,13 +1072,6 @@
             <a:prstDash val="solid"/>
           </a:ln>
         </p:spPr>
-        <p:txBody>
-          <a:bodyPr/>
-          <a:lstStyle/>
-          <a:p>
-            <a:endParaRPr lang="en-US"/>
-          </a:p>
-        </p:txBody>
       </p:sp>
       <p:sp>
         <p:nvSpPr>
@@ -1086,13 +1103,6 @@
             <a:prstDash val="solid"/>
           </a:ln>
         </p:spPr>
-        <p:txBody>
-          <a:bodyPr/>
-          <a:lstStyle/>
-          <a:p>
-            <a:endParaRPr lang="en-US"/>
-          </a:p>
-        </p:txBody>
       </p:sp>
       <p:sp>
         <p:nvSpPr>
@@ -1173,7 +1183,7 @@
           </a:ln>
         </p:spPr>
         <p:txBody>
-          <a:bodyPr/>
+          <a:bodyPr lIns="91440" tIns="45720" rIns="91440" bIns="45720" anchor="t"/>
           <a:lstStyle/>
           <a:p>
             <a:pPr>
@@ -1184,20 +1194,28 @@
               </a:defRPr>
             </a:pPr>
             <a:r>
-              <a:rPr lang="en-US" sz="3900" b="1" dirty="0">
-                <a:solidFill>
-                  <a:srgbClr val="000000"/>
-                </a:solidFill>
-              </a:rPr>
-              <a:t>Regulation-verified</a:t>
-            </a:r>
-            <a:r>
-              <a:rPr sz="3900" b="1" dirty="0">
-                <a:solidFill>
-                  <a:srgbClr val="000000"/>
-                </a:solidFill>
-              </a:rPr>
-              <a:t> loan review can protect public dollars without slowing the economy.</a:t>
+              <a:rPr lang="en-US" sz="4800" b="1" dirty="0">
+                <a:solidFill>
+                  <a:srgbClr val="000000"/>
+                </a:solidFill>
+              </a:rPr>
+              <a:t>AI </a:t>
+            </a:r>
+            <a:r>
+              <a:rPr sz="4800" b="1">
+                <a:solidFill>
+                  <a:srgbClr val="000000"/>
+                </a:solidFill>
+              </a:rPr>
+              <a:t>loan review </a:t>
+            </a:r>
+            <a:r>
+              <a:rPr lang="en-US" sz="4800" b="1" dirty="0">
+                <a:solidFill>
+                  <a:srgbClr val="000000"/>
+                </a:solidFill>
+              </a:rPr>
+              <a:t>of SBA Application</a:t>
             </a:r>
           </a:p>
         </p:txBody>
@@ -1231,7 +1249,7 @@
           </a:ln>
         </p:spPr>
         <p:txBody>
-          <a:bodyPr/>
+          <a:bodyPr lIns="91440" tIns="45720" rIns="91440" bIns="45720" anchor="t"/>
           <a:lstStyle/>
           <a:p>
             <a:pPr>
@@ -1247,15 +1265,23 @@
                   <a:srgbClr val="555555"/>
                 </a:solidFill>
               </a:rPr>
-              <a:t>The </a:t>
-            </a:r>
-            <a:r>
-              <a:rPr sz="1800" b="0" dirty="0">
+              <a:t>The Freedom250 </a:t>
+            </a:r>
+            <a:r>
+              <a:rPr lang="en-US" dirty="0">
                 <a:solidFill>
                   <a:srgbClr val="555555"/>
                 </a:solidFill>
               </a:rPr>
-              <a:t>Freedom250 </a:t>
+              <a:t>POC serves </a:t>
+            </a:r>
+            <a:r>
+              <a:rPr lang="en-US" sz="1800" b="0" dirty="0">
+                <a:solidFill>
+                  <a:srgbClr val="555555"/>
+                </a:solidFill>
+              </a:rPr>
+              <a:t>as an SBA reviewer tool: pick a loan record, run eligibility and </a:t>
             </a:r>
             <a:r>
               <a:rPr lang="en-US" dirty="0">
@@ -1263,16 +1289,55 @@
                   <a:srgbClr val="555555"/>
                 </a:solidFill>
               </a:rPr>
-              <a:t>POC serves as an SBA reviewer tool: pick a loan record, run eligibility and audit spend checks, and see the exact Title 13 citation for</a:t>
-            </a:r>
-            <a:r>
-              <a:rPr sz="1800" b="0" dirty="0">
+              <a:t>audit spend </a:t>
+            </a:r>
+            <a:r>
+              <a:rPr lang="en-US" sz="1800" b="0" dirty="0">
                 <a:solidFill>
                   <a:srgbClr val="555555"/>
                 </a:solidFill>
               </a:rPr>
-              <a:t> each finding.</a:t>
-            </a:r>
+              <a:t>checks, and see the exact </a:t>
+            </a:r>
+            <a:r>
+              <a:rPr lang="en-US" dirty="0">
+                <a:solidFill>
+                  <a:srgbClr val="555555"/>
+                </a:solidFill>
+              </a:rPr>
+              <a:t>SBA </a:t>
+            </a:r>
+            <a:r>
+              <a:rPr lang="en-US">
+                <a:solidFill>
+                  <a:srgbClr val="555555"/>
+                </a:solidFill>
+              </a:rPr>
+              <a:t>regulation statute for </a:t>
+            </a:r>
+            <a:r>
+              <a:rPr lang="en-US" sz="1800" b="0">
+                <a:solidFill>
+                  <a:srgbClr val="555555"/>
+                </a:solidFill>
+              </a:rPr>
+              <a:t>each finding.</a:t>
+            </a:r>
+            <a:endParaRPr lang="en-US"/>
+          </a:p>
+          <a:p>
+            <a:pPr algn="l">
+              <a:defRPr sz="1800" b="0">
+                <a:solidFill>
+                  <a:srgbClr val="555555"/>
+                </a:solidFill>
+              </a:defRPr>
+            </a:pPr>
+            <a:endParaRPr sz="1800" b="0" dirty="0">
+              <a:solidFill>
+                <a:srgbClr val="555555"/>
+              </a:solidFill>
+            </a:endParaRPr>
           </a:p>
         </p:txBody>
       </p:sp>
@@ -1292,20 +1357,20 @@
         </p:nvSpPr>
         <p:spPr>
           <a:xfrm>
-            <a:off x="8810624" y="1809750"/>
-            <a:ext cx="2981325" cy="495300"/>
-          </a:xfrm>
-          <a:prstGeom prst="rect">
-            <a:avLst/>
-          </a:prstGeom>
-          <a:noFill/>
-          <a:ln w="0">
-            <a:noFill/>
-            <a:prstDash val="solid"/>
-          </a:ln>
-        </p:spPr>
-        <p:txBody>
-          <a:bodyPr/>
+            <a:off x="8610600" y="1662113"/>
+            <a:ext cx="2971800" cy="700087"/>
+          </a:xfrm>
+          <a:prstGeom prst="rect">
+            <a:avLst/>
+          </a:prstGeom>
+          <a:noFill/>
+          <a:ln w="0">
+            <a:noFill/>
+            <a:prstDash val="solid"/>
+          </a:ln>
+        </p:spPr>
+        <p:txBody>
+          <a:bodyPr lIns="91440" tIns="45720" rIns="91440" bIns="45720" anchor="t"/>
           <a:lstStyle/>
           <a:p>
             <a:pPr algn="l">
@@ -1316,7 +1381,7 @@
               </a:defRPr>
             </a:pPr>
             <a:r>
-              <a:rPr sz="1950" b="1" dirty="0">
+              <a:rPr sz="1950" b="1">
                 <a:solidFill>
                   <a:srgbClr val="000000"/>
                 </a:solidFill>
@@ -1324,59 +1389,13 @@
               <a:t>Benefit to the </a:t>
             </a:r>
             <a:r>
-              <a:rPr lang="en-US" sz="1950" b="1" dirty="0">
-                <a:solidFill>
-                  <a:srgbClr val="000000"/>
-                </a:solidFill>
-              </a:rPr>
-              <a:t>R</a:t>
-            </a:r>
-            <a:r>
-              <a:rPr sz="1950" b="1" dirty="0">
-                <a:solidFill>
-                  <a:srgbClr val="000000"/>
-                </a:solidFill>
-              </a:rPr>
-              <a:t>epublic</a:t>
-            </a:r>
-          </a:p>
-        </p:txBody>
-      </p:sp>
-      <p:sp>
-        <p:nvSpPr>
-          <p:cNvPr id="7" name="marker-260">
-            <a:extLst>
-              <a:ext uri="{FF2B5EF4-FFF2-40B4-BE49-F238E27FC236}">
-                <a16:creationId xmlns:a16="http://schemas.microsoft.com/office/drawing/2014/main" id="{FFF4BBD1-8BEC-4C36-B3D5-249512E264C2}"/>
-              </a:ext>
-            </a:extLst>
-          </p:cNvPr>
-          <p:cNvSpPr>
-            <a:spLocks noGrp="1"/>
-          </p:cNvSpPr>
-          <p:nvPr/>
-        </p:nvSpPr>
-        <p:spPr>
-          <a:xfrm>
-            <a:off x="8810625" y="2552700"/>
-            <a:ext cx="85725" cy="85725"/>
-          </a:xfrm>
-          <a:prstGeom prst="rect">
-            <a:avLst/>
-          </a:prstGeom>
-          <a:solidFill>
-            <a:srgbClr val="000000"/>
-          </a:solidFill>
-          <a:ln w="0">
-            <a:noFill/>
-            <a:prstDash val="solid"/>
-          </a:ln>
-        </p:spPr>
-        <p:txBody>
-          <a:bodyPr/>
-          <a:lstStyle/>
-          <a:p>
-            <a:endParaRPr lang="en-US"/>
+              <a:rPr lang="en-US" sz="1950" b="1">
+                <a:solidFill>
+                  <a:srgbClr val="000000"/>
+                </a:solidFill>
+              </a:rPr>
+              <a:t>Republic</a:t>
+            </a:r>
           </a:p>
         </p:txBody>
       </p:sp>
@@ -1396,23 +1415,25 @@
         </p:nvSpPr>
         <p:spPr>
           <a:xfrm>
-            <a:off x="9039225" y="2476500"/>
-            <a:ext cx="2438400" cy="552450"/>
-          </a:xfrm>
-          <a:prstGeom prst="rect">
-            <a:avLst/>
-          </a:prstGeom>
-          <a:noFill/>
-          <a:ln w="0">
-            <a:noFill/>
-            <a:prstDash val="solid"/>
-          </a:ln>
-        </p:spPr>
-        <p:txBody>
-          <a:bodyPr/>
-          <a:lstStyle/>
-          <a:p>
-            <a:pPr algn="l">
+            <a:off x="8610601" y="2362200"/>
+            <a:ext cx="3571874" cy="2809875"/>
+          </a:xfrm>
+          <a:prstGeom prst="rect">
+            <a:avLst/>
+          </a:prstGeom>
+          <a:noFill/>
+          <a:ln w="0">
+            <a:noFill/>
+            <a:prstDash val="solid"/>
+          </a:ln>
+        </p:spPr>
+        <p:txBody>
+          <a:bodyPr lIns="91440" tIns="45720" rIns="91440" bIns="45720" anchor="t"/>
+          <a:lstStyle/>
+          <a:p>
+            <a:pPr marL="285750" indent="-285750">
+              <a:buFont typeface="Arial"/>
+              <a:buChar char="•"/>
               <a:defRPr sz="1650" b="0">
                 <a:solidFill>
                   <a:srgbClr val="000000"/>
@@ -1420,51 +1441,126 @@
               </a:defRPr>
             </a:pPr>
             <a:r>
-              <a:rPr sz="1650" b="0">
-                <a:solidFill>
-                  <a:srgbClr val="000000"/>
-                </a:solidFill>
-              </a:rPr>
-              <a:t>Less time lost to manual regulation lookup</a:t>
-            </a:r>
-          </a:p>
-        </p:txBody>
-      </p:sp>
-      <p:sp>
-        <p:nvSpPr>
-          <p:cNvPr id="9" name="marker-344">
-            <a:extLst>
-              <a:ext uri="{FF2B5EF4-FFF2-40B4-BE49-F238E27FC236}">
-                <a16:creationId xmlns:a16="http://schemas.microsoft.com/office/drawing/2014/main" id="{0C016ECF-D7AB-48D6-8A0C-CE29964A1E20}"/>
-              </a:ext>
-            </a:extLst>
-          </p:cNvPr>
-          <p:cNvSpPr>
-            <a:spLocks noGrp="1"/>
-          </p:cNvSpPr>
-          <p:nvPr/>
-        </p:nvSpPr>
-        <p:spPr>
-          <a:xfrm>
-            <a:off x="8810625" y="3352800"/>
-            <a:ext cx="85725" cy="85725"/>
-          </a:xfrm>
-          <a:prstGeom prst="rect">
-            <a:avLst/>
-          </a:prstGeom>
-          <a:solidFill>
-            <a:srgbClr val="000000"/>
-          </a:solidFill>
-          <a:ln w="0">
-            <a:noFill/>
-            <a:prstDash val="solid"/>
-          </a:ln>
-        </p:spPr>
-        <p:txBody>
-          <a:bodyPr/>
-          <a:lstStyle/>
-          <a:p>
-            <a:endParaRPr lang="en-US"/>
+              <a:rPr sz="2000" b="0" dirty="0">
+                <a:solidFill>
+                  <a:srgbClr val="000000"/>
+                </a:solidFill>
+              </a:rPr>
+              <a:t>Less</a:t>
+            </a:r>
+            <a:r>
+              <a:rPr lang="en-US" sz="2000">
+                <a:solidFill>
+                  <a:srgbClr val="000000"/>
+                </a:solidFill>
+              </a:rPr>
+              <a:t> labor required to audit loan applications and financial records</a:t>
+            </a:r>
+            <a:endParaRPr lang="en-US" sz="2000" dirty="0">
+              <a:solidFill>
+                <a:srgbClr val="000000"/>
+              </a:solidFill>
+            </a:endParaRPr>
+          </a:p>
+          <a:p>
+            <a:pPr marL="285750" indent="-285750">
+              <a:buFont typeface="Arial"/>
+              <a:buChar char="•"/>
+              <a:defRPr sz="1650" b="0">
+                <a:solidFill>
+                  <a:srgbClr val="000000"/>
+                </a:solidFill>
+              </a:defRPr>
+            </a:pPr>
+            <a:endParaRPr lang="en-US" sz="2000" dirty="0">
+              <a:solidFill>
+                <a:srgbClr val="000000"/>
+              </a:solidFill>
+            </a:endParaRPr>
+          </a:p>
+          <a:p>
+            <a:pPr marL="285750" indent="-285750">
+              <a:buFont typeface="Arial"/>
+              <a:buChar char="•"/>
+              <a:defRPr sz="1650" b="0">
+                <a:solidFill>
+                  <a:srgbClr val="000000"/>
+                </a:solidFill>
+              </a:defRPr>
+            </a:pPr>
+            <a:r>
+              <a:rPr lang="en-US" sz="2000">
+                <a:solidFill>
+                  <a:srgbClr val="000000"/>
+                </a:solidFill>
+              </a:rPr>
+              <a:t>Save</a:t>
+            </a:r>
+            <a:r>
+              <a:rPr lang="en-US" sz="2000"/>
+              <a:t> Taxpayers MONEY</a:t>
+            </a:r>
+            <a:endParaRPr lang="en-US" sz="2000" dirty="0"/>
+          </a:p>
+          <a:p>
+            <a:pPr marL="285750" indent="-285750">
+              <a:buFont typeface="Arial"/>
+              <a:buChar char="•"/>
+              <a:defRPr sz="1650" b="0">
+                <a:solidFill>
+                  <a:srgbClr val="000000"/>
+                </a:solidFill>
+              </a:defRPr>
+            </a:pPr>
+            <a:endParaRPr lang="en-US" sz="2000" dirty="0"/>
+          </a:p>
+          <a:p>
+            <a:pPr marL="285750" indent="-285750">
+              <a:buFont typeface="Arial"/>
+              <a:buChar char="•"/>
+              <a:defRPr sz="1650" b="0">
+                <a:solidFill>
+                  <a:srgbClr val="000000"/>
+                </a:solidFill>
+              </a:defRPr>
+            </a:pPr>
+            <a:r>
+              <a:rPr lang="en-US" sz="2000"/>
+              <a:t>Backed </a:t>
+            </a:r>
+            <a:r>
+              <a:rPr lang="en-US" sz="2000" dirty="0"/>
+              <a:t>by </a:t>
+            </a:r>
+            <a:r>
+              <a:rPr lang="en-US" sz="2000"/>
+              <a:t>regulation-based</a:t>
+            </a:r>
+            <a:r>
+              <a:rPr lang="en-US" sz="2000" dirty="0"/>
+              <a:t> evidence</a:t>
+            </a:r>
+            <a:endParaRPr lang="en-US" sz="2000"/>
+          </a:p>
+          <a:p>
+            <a:pPr>
+              <a:defRPr sz="1650" b="0">
+                <a:solidFill>
+                  <a:srgbClr val="000000"/>
+                </a:solidFill>
+              </a:defRPr>
+            </a:pPr>
+            <a:endParaRPr lang="en-US" sz="1700" dirty="0"/>
+          </a:p>
+          <a:p>
+            <a:pPr>
+              <a:defRPr sz="1650" b="0">
+                <a:solidFill>
+                  <a:srgbClr val="000000"/>
+                </a:solidFill>
+              </a:defRPr>
+            </a:pPr>
+            <a:endParaRPr lang="en-US" dirty="0"/>
           </a:p>
         </p:txBody>
       </p:sp>
@@ -1484,125 +1580,34 @@
         </p:nvSpPr>
         <p:spPr>
           <a:xfrm>
-            <a:off x="9039225" y="3276600"/>
-            <a:ext cx="2438400" cy="552450"/>
-          </a:xfrm>
-          <a:prstGeom prst="rect">
-            <a:avLst/>
-          </a:prstGeom>
-          <a:noFill/>
-          <a:ln w="0">
-            <a:noFill/>
-            <a:prstDash val="solid"/>
-          </a:ln>
-        </p:spPr>
-        <p:txBody>
-          <a:bodyPr/>
-          <a:lstStyle/>
-          <a:p>
-            <a:pPr algn="l">
+            <a:off x="9005888" y="3348037"/>
+            <a:ext cx="2466975" cy="833437"/>
+          </a:xfrm>
+          <a:prstGeom prst="rect">
+            <a:avLst/>
+          </a:prstGeom>
+          <a:noFill/>
+          <a:ln w="0">
+            <a:noFill/>
+            <a:prstDash val="solid"/>
+          </a:ln>
+        </p:spPr>
+        <p:txBody>
+          <a:bodyPr lIns="91440" tIns="45720" rIns="91440" bIns="45720" anchor="t"/>
+          <a:lstStyle/>
+          <a:p>
+            <a:pPr>
               <a:defRPr sz="1650" b="0">
                 <a:solidFill>
                   <a:srgbClr val="000000"/>
                 </a:solidFill>
               </a:defRPr>
             </a:pPr>
-            <a:r>
-              <a:rPr sz="1650" b="0">
-                <a:solidFill>
-                  <a:srgbClr val="000000"/>
-                </a:solidFill>
-              </a:rPr>
-              <a:t>More consistent treatment across borrowers</a:t>
-            </a:r>
-          </a:p>
-        </p:txBody>
-      </p:sp>
-      <p:sp>
-        <p:nvSpPr>
-          <p:cNvPr id="11" name="marker-428">
-            <a:extLst>
-              <a:ext uri="{FF2B5EF4-FFF2-40B4-BE49-F238E27FC236}">
-                <a16:creationId xmlns:a16="http://schemas.microsoft.com/office/drawing/2014/main" id="{A67807F4-FD6F-46A9-946A-3A6DD43CFDDB}"/>
-              </a:ext>
-            </a:extLst>
-          </p:cNvPr>
-          <p:cNvSpPr>
-            <a:spLocks noGrp="1"/>
-          </p:cNvSpPr>
-          <p:nvPr/>
-        </p:nvSpPr>
-        <p:spPr>
-          <a:xfrm>
-            <a:off x="8810625" y="4152900"/>
-            <a:ext cx="85725" cy="85725"/>
-          </a:xfrm>
-          <a:prstGeom prst="rect">
-            <a:avLst/>
-          </a:prstGeom>
-          <a:solidFill>
-            <a:srgbClr val="000000"/>
-          </a:solidFill>
-          <a:ln w="0">
-            <a:noFill/>
-            <a:prstDash val="solid"/>
-          </a:ln>
-        </p:spPr>
-        <p:txBody>
-          <a:bodyPr/>
-          <a:lstStyle/>
-          <a:p>
-            <a:endParaRPr lang="en-US"/>
-          </a:p>
-        </p:txBody>
-      </p:sp>
-      <p:sp>
-        <p:nvSpPr>
-          <p:cNvPr id="12" name="bullet-428">
-            <a:extLst>
-              <a:ext uri="{FF2B5EF4-FFF2-40B4-BE49-F238E27FC236}">
-                <a16:creationId xmlns:a16="http://schemas.microsoft.com/office/drawing/2014/main" id="{AA177359-02FB-48FC-9118-FE9030AE63EE}"/>
-              </a:ext>
-            </a:extLst>
-          </p:cNvPr>
-          <p:cNvSpPr>
-            <a:spLocks noGrp="1"/>
-          </p:cNvSpPr>
-          <p:nvPr/>
-        </p:nvSpPr>
-        <p:spPr>
-          <a:xfrm>
-            <a:off x="9039225" y="4076700"/>
-            <a:ext cx="2438400" cy="552450"/>
-          </a:xfrm>
-          <a:prstGeom prst="rect">
-            <a:avLst/>
-          </a:prstGeom>
-          <a:noFill/>
-          <a:ln w="0">
-            <a:noFill/>
-            <a:prstDash val="solid"/>
-          </a:ln>
-        </p:spPr>
-        <p:txBody>
-          <a:bodyPr/>
-          <a:lstStyle/>
-          <a:p>
-            <a:pPr algn="l">
-              <a:defRPr sz="1650" b="0">
-                <a:solidFill>
-                  <a:srgbClr val="000000"/>
-                </a:solidFill>
-              </a:defRPr>
-            </a:pPr>
-            <a:r>
-              <a:rPr sz="1650" b="0">
-                <a:solidFill>
-                  <a:srgbClr val="000000"/>
-                </a:solidFill>
-              </a:rPr>
-              <a:t>Defensible decisions with cited evidence</a:t>
-            </a:r>
+            <a:endParaRPr lang="en-US" sz="1650" dirty="0">
+              <a:solidFill>
+                <a:srgbClr val="000000"/>
+              </a:solidFill>
+            </a:endParaRPr>
           </a:p>
         </p:txBody>
       </p:sp>
@@ -3078,7 +3083,7 @@
     </p:spTree>
     <p:extLst>
       <p:ext uri="{BB962C8B-B14F-4D97-AF65-F5344CB8AC3E}">
-        <p14:creationId xmlns:p14="http://schemas.microsoft.com/office/powerpoint/2010/main" val="1625318261"/>
+        <p14:creationId xmlns:p14="http://schemas.microsoft.com/office/powerpoint/2010/main" val="2052794170"/>
       </p:ext>
     </p:extLst>
   </p:cSld>
@@ -3295,13 +3300,6 @@
             <a:prstDash val="solid"/>
           </a:ln>
         </p:spPr>
-        <p:txBody>
-          <a:bodyPr/>
-          <a:lstStyle/>
-          <a:p>
-            <a:endParaRPr lang="en-US"/>
-          </a:p>
-        </p:txBody>
       </p:sp>
       <p:sp>
         <p:nvSpPr>
@@ -3485,13 +3483,6 @@
             <a:prstDash val="solid"/>
           </a:ln>
         </p:spPr>
-        <p:txBody>
-          <a:bodyPr/>
-          <a:lstStyle/>
-          <a:p>
-            <a:endParaRPr lang="en-US"/>
-          </a:p>
-        </p:txBody>
       </p:sp>
       <p:sp>
         <p:nvSpPr>
@@ -3583,7 +3574,7 @@
               </a:defRPr>
             </a:pPr>
             <a:r>
-              <a:rPr sz="1125" b="0" dirty="0">
+              <a:rPr sz="1125" b="0">
                 <a:solidFill>
                   <a:srgbClr val="000000"/>
                 </a:solidFill>
@@ -3675,13 +3666,6 @@
             <a:prstDash val="solid"/>
           </a:ln>
         </p:spPr>
-        <p:txBody>
-          <a:bodyPr/>
-          <a:lstStyle/>
-          <a:p>
-            <a:endParaRPr lang="en-US"/>
-          </a:p>
-        </p:txBody>
       </p:sp>
       <p:sp>
         <p:nvSpPr>
@@ -3773,7 +3757,7 @@
               </a:defRPr>
             </a:pPr>
             <a:r>
-              <a:rPr sz="1125" b="0" dirty="0">
+              <a:rPr sz="1125" b="0">
                 <a:solidFill>
                   <a:srgbClr val="000000"/>
                 </a:solidFill>
@@ -3865,13 +3849,6 @@
             <a:prstDash val="solid"/>
           </a:ln>
         </p:spPr>
-        <p:txBody>
-          <a:bodyPr/>
-          <a:lstStyle/>
-          <a:p>
-            <a:endParaRPr lang="en-US"/>
-          </a:p>
-        </p:txBody>
       </p:sp>
       <p:sp>
         <p:nvSpPr>
@@ -4055,13 +4032,6 @@
             <a:prstDash val="solid"/>
           </a:ln>
         </p:spPr>
-        <p:txBody>
-          <a:bodyPr/>
-          <a:lstStyle/>
-          <a:p>
-            <a:endParaRPr lang="en-US"/>
-          </a:p>
-        </p:txBody>
       </p:sp>
       <p:sp>
         <p:nvSpPr>
@@ -4245,13 +4215,6 @@
             <a:prstDash val="solid"/>
           </a:ln>
         </p:spPr>
-        <p:txBody>
-          <a:bodyPr/>
-          <a:lstStyle/>
-          <a:p>
-            <a:endParaRPr lang="en-US"/>
-          </a:p>
-        </p:txBody>
       </p:sp>
       <p:sp>
         <p:nvSpPr>
@@ -4467,6 +4430,66 @@
 </file>
 
 <file path=ppt/slides/slide4.xml><?xml version="1.0" encoding="utf-8"?>
+<p:sld xmlns:a="http://schemas.openxmlformats.org/drawingml/2006/main" xmlns:r="http://schemas.openxmlformats.org/officeDocument/2006/relationships" xmlns:p="http://schemas.openxmlformats.org/presentationml/2006/main">
+  <p:cSld>
+    <p:spTree>
+      <p:nvGrpSpPr>
+        <p:cNvPr id="1" name=""/>
+        <p:cNvGrpSpPr/>
+        <p:nvPr/>
+      </p:nvGrpSpPr>
+      <p:grpSpPr>
+        <a:xfrm>
+          <a:off x="0" y="0"/>
+          <a:ext cx="0" cy="0"/>
+          <a:chOff x="0" y="0"/>
+          <a:chExt cx="0" cy="0"/>
+        </a:xfrm>
+      </p:grpSpPr>
+    </p:spTree>
+    <p:extLst>
+      <p:ext uri="{BB962C8B-B14F-4D97-AF65-F5344CB8AC3E}">
+        <p14:creationId xmlns:p14="http://schemas.microsoft.com/office/powerpoint/2010/main" val="1637503949"/>
+      </p:ext>
+    </p:extLst>
+  </p:cSld>
+  <p:clrMapOvr>
+    <a:masterClrMapping/>
+  </p:clrMapOvr>
+</p:sld>
+</file>
+
+<file path=ppt/slides/slide5.xml><?xml version="1.0" encoding="utf-8"?>
+<p:sld xmlns:a="http://schemas.openxmlformats.org/drawingml/2006/main" xmlns:r="http://schemas.openxmlformats.org/officeDocument/2006/relationships" xmlns:p="http://schemas.openxmlformats.org/presentationml/2006/main">
+  <p:cSld>
+    <p:spTree>
+      <p:nvGrpSpPr>
+        <p:cNvPr id="1" name=""/>
+        <p:cNvGrpSpPr/>
+        <p:nvPr/>
+      </p:nvGrpSpPr>
+      <p:grpSpPr>
+        <a:xfrm>
+          <a:off x="0" y="0"/>
+          <a:ext cx="0" cy="0"/>
+          <a:chOff x="0" y="0"/>
+          <a:chExt cx="0" cy="0"/>
+        </a:xfrm>
+      </p:grpSpPr>
+    </p:spTree>
+    <p:extLst>
+      <p:ext uri="{BB962C8B-B14F-4D97-AF65-F5344CB8AC3E}">
+        <p14:creationId xmlns:p14="http://schemas.microsoft.com/office/powerpoint/2010/main" val="462932607"/>
+      </p:ext>
+    </p:extLst>
+  </p:cSld>
+  <p:clrMapOvr>
+    <a:masterClrMapping/>
+  </p:clrMapOvr>
+</p:sld>
+</file>
+
+<file path=ppt/slides/slide6.xml><?xml version="1.0" encoding="utf-8"?>
 <p:sld xmlns:a="http://schemas.openxmlformats.org/drawingml/2006/main" xmlns:r="http://schemas.openxmlformats.org/officeDocument/2006/relationships" xmlns:p="http://schemas.openxmlformats.org/presentationml/2006/main">
   <p:cSld>
     <p:bg>
@@ -4671,13 +4694,6 @@
             <a:prstDash val="solid"/>
           </a:ln>
         </p:spPr>
-        <p:txBody>
-          <a:bodyPr/>
-          <a:lstStyle/>
-          <a:p>
-            <a:endParaRPr lang="en-US"/>
-          </a:p>
-        </p:txBody>
       </p:sp>
       <p:sp>
         <p:nvSpPr>
@@ -4809,13 +4825,6 @@
             <a:prstDash val="solid"/>
           </a:ln>
         </p:spPr>
-        <p:txBody>
-          <a:bodyPr/>
-          <a:lstStyle/>
-          <a:p>
-            <a:endParaRPr lang="en-US"/>
-          </a:p>
-        </p:txBody>
       </p:sp>
       <p:sp>
         <p:nvSpPr>
@@ -4947,13 +4956,6 @@
             <a:prstDash val="solid"/>
           </a:ln>
         </p:spPr>
-        <p:txBody>
-          <a:bodyPr/>
-          <a:lstStyle/>
-          <a:p>
-            <a:endParaRPr lang="en-US"/>
-          </a:p>
-        </p:txBody>
       </p:sp>
       <p:sp>
         <p:nvSpPr>
@@ -5085,13 +5087,6 @@
             <a:prstDash val="solid"/>
           </a:ln>
         </p:spPr>
-        <p:txBody>
-          <a:bodyPr/>
-          <a:lstStyle/>
-          <a:p>
-            <a:endParaRPr lang="en-US"/>
-          </a:p>
-        </p:txBody>
       </p:sp>
       <p:sp>
         <p:nvSpPr>
@@ -5306,7 +5301,7 @@
 </p:sld>
 </file>
 
-<file path=ppt/slides/slide5.xml><?xml version="1.0" encoding="utf-8"?>
+<file path=ppt/slides/slide7.xml><?xml version="1.0" encoding="utf-8"?>
 <p:sld xmlns:a="http://schemas.openxmlformats.org/drawingml/2006/main" xmlns:r="http://schemas.openxmlformats.org/officeDocument/2006/relationships" xmlns:p="http://schemas.openxmlformats.org/presentationml/2006/main">
   <p:cSld>
     <p:bg>
@@ -5361,13 +5356,6 @@
             <a:prstDash val="solid"/>
           </a:ln>
         </p:spPr>
-        <p:txBody>
-          <a:bodyPr/>
-          <a:lstStyle/>
-          <a:p>
-            <a:endParaRPr lang="en-US"/>
-          </a:p>
-        </p:txBody>
       </p:sp>
       <p:sp>
         <p:nvSpPr>
@@ -5499,13 +5487,6 @@
             <a:prstDash val="solid"/>
           </a:ln>
         </p:spPr>
-        <p:txBody>
-          <a:bodyPr/>
-          <a:lstStyle/>
-          <a:p>
-            <a:endParaRPr lang="en-US"/>
-          </a:p>
-        </p:txBody>
       </p:sp>
       <p:sp>
         <p:nvSpPr>
@@ -5687,13 +5668,6 @@
             <a:prstDash val="solid"/>
           </a:ln>
         </p:spPr>
-        <p:txBody>
-          <a:bodyPr/>
-          <a:lstStyle/>
-          <a:p>
-            <a:endParaRPr lang="en-US"/>
-          </a:p>
-        </p:txBody>
       </p:sp>
       <p:sp>
         <p:nvSpPr>
@@ -5875,13 +5849,6 @@
             <a:prstDash val="solid"/>
           </a:ln>
         </p:spPr>
-        <p:txBody>
-          <a:bodyPr/>
-          <a:lstStyle/>
-          <a:p>
-            <a:endParaRPr lang="en-US"/>
-          </a:p>
-        </p:txBody>
       </p:sp>
       <p:sp>
         <p:nvSpPr>
@@ -6063,13 +6030,6 @@
             <a:prstDash val="solid"/>
           </a:ln>
         </p:spPr>
-        <p:txBody>
-          <a:bodyPr/>
-          <a:lstStyle/>
-          <a:p>
-            <a:endParaRPr lang="en-US"/>
-          </a:p>
-        </p:txBody>
       </p:sp>
       <p:sp>
         <p:nvSpPr>
